--- a/catalog/samples/horizontal_axis_table.pptx
+++ b/catalog/samples/horizontal_axis_table.pptx
@@ -1722,7 +1722,7 @@
           </a:p>
           <a:p>
             <a:r>
-              <a:t>  "template_sha256": "01a4b5b74643dc5c530ba307601185fe5acce93781ca9c5d292498387e300786"</a:t>
+              <a:t>  "template_sha256": "3b76aceef847ce0ca0934ae179b77167c9b3c196e38c971f702263bc2e6753e4"</a:t>
             </a:r>
           </a:p>
           <a:p>
